--- a/4. Data Presentation/Bright Coffee Shop (.pptx
+++ b/4. Data Presentation/Bright Coffee Shop (.pptx
@@ -4,6 +4,9 @@
   <p:sldMasterIdLst>
     <p:sldMasterId id="2147483648" r:id="rId1"/>
   </p:sldMasterIdLst>
+  <p:notesMasterIdLst>
+    <p:notesMasterId r:id="rId14"/>
+  </p:notesMasterIdLst>
   <p:sldIdLst>
     <p:sldId id="256" r:id="rId2"/>
     <p:sldId id="257" r:id="rId3"/>
@@ -15,19 +18,27 @@
     <p:sldId id="263" r:id="rId9"/>
     <p:sldId id="264" r:id="rId10"/>
     <p:sldId id="265" r:id="rId11"/>
-    <p:sldId id="266" r:id="rId12"/>
+    <p:sldId id="267" r:id="rId12"/>
+    <p:sldId id="266" r:id="rId13"/>
   </p:sldIdLst>
   <p:sldSz cx="18288000" cy="10287000"/>
   <p:notesSz cx="6858000" cy="9144000"/>
   <p:embeddedFontLst>
     <p:embeddedFont>
-      <p:font typeface="Crusoe Text"/>
-      <p:regular r:id="rId13"/>
+      <p:font typeface="Avenir Next Condensed" panose="020B0506020202020204" pitchFamily="34" charset="0"/>
+      <p:regular r:id="rId15"/>
+      <p:bold r:id="rId16"/>
+      <p:italic r:id="rId17"/>
+      <p:boldItalic r:id="rId18"/>
     </p:embeddedFont>
     <p:embeddedFont>
-      <p:font typeface="Crusoe Text Bold"/>
-      <p:regular r:id="rId14"/>
-      <p:bold r:id="rId15"/>
+      <p:font typeface="Crusoe Text" pitchFamily="2" charset="77"/>
+      <p:regular r:id="rId19"/>
+    </p:embeddedFont>
+    <p:embeddedFont>
+      <p:font typeface="Crusoe Text Bold" pitchFamily="2" charset="77"/>
+      <p:regular r:id="rId20"/>
+      <p:bold r:id="rId21"/>
     </p:embeddedFont>
   </p:embeddedFontLst>
   <p:defaultTextStyle>
@@ -144,6 +155,440 @@
 </p:presentation>
 </file>
 
+<file path=ppt/notesMasters/notesMaster1.xml><?xml version="1.0" encoding="utf-8"?>
+<p:notesMaster xmlns:a="http://schemas.openxmlformats.org/drawingml/2006/main" xmlns:r="http://schemas.openxmlformats.org/officeDocument/2006/relationships" xmlns:p="http://schemas.openxmlformats.org/presentationml/2006/main">
+  <p:cSld>
+    <p:bg>
+      <p:bgRef idx="1001">
+        <a:schemeClr val="bg1"/>
+      </p:bgRef>
+    </p:bg>
+    <p:spTree>
+      <p:nvGrpSpPr>
+        <p:cNvPr id="1" name=""/>
+        <p:cNvGrpSpPr/>
+        <p:nvPr/>
+      </p:nvGrpSpPr>
+      <p:grpSpPr>
+        <a:xfrm>
+          <a:off x="0" y="0"/>
+          <a:ext cx="0" cy="0"/>
+          <a:chOff x="0" y="0"/>
+          <a:chExt cx="0" cy="0"/>
+        </a:xfrm>
+      </p:grpSpPr>
+      <p:sp>
+        <p:nvSpPr>
+          <p:cNvPr id="2" name="Header Placeholder 1"/>
+          <p:cNvSpPr>
+            <a:spLocks noGrp="1"/>
+          </p:cNvSpPr>
+          <p:nvPr>
+            <p:ph type="hdr" sz="quarter"/>
+          </p:nvPr>
+        </p:nvSpPr>
+        <p:spPr>
+          <a:xfrm>
+            <a:off x="0" y="0"/>
+            <a:ext cx="2971800" cy="458788"/>
+          </a:xfrm>
+          <a:prstGeom prst="rect">
+            <a:avLst/>
+          </a:prstGeom>
+        </p:spPr>
+        <p:txBody>
+          <a:bodyPr vert="horz" lIns="91440" tIns="45720" rIns="91440" bIns="45720" rtlCol="0"/>
+          <a:lstStyle>
+            <a:lvl1pPr algn="l">
+              <a:defRPr sz="1200"/>
+            </a:lvl1pPr>
+          </a:lstStyle>
+          <a:p>
+            <a:endParaRPr lang="en-US"/>
+          </a:p>
+        </p:txBody>
+      </p:sp>
+      <p:sp>
+        <p:nvSpPr>
+          <p:cNvPr id="3" name="Date Placeholder 2"/>
+          <p:cNvSpPr>
+            <a:spLocks noGrp="1"/>
+          </p:cNvSpPr>
+          <p:nvPr>
+            <p:ph type="dt" idx="1"/>
+          </p:nvPr>
+        </p:nvSpPr>
+        <p:spPr>
+          <a:xfrm>
+            <a:off x="3884613" y="0"/>
+            <a:ext cx="2971800" cy="458788"/>
+          </a:xfrm>
+          <a:prstGeom prst="rect">
+            <a:avLst/>
+          </a:prstGeom>
+        </p:spPr>
+        <p:txBody>
+          <a:bodyPr vert="horz" lIns="91440" tIns="45720" rIns="91440" bIns="45720" rtlCol="0"/>
+          <a:lstStyle>
+            <a:lvl1pPr algn="r">
+              <a:defRPr sz="1200"/>
+            </a:lvl1pPr>
+          </a:lstStyle>
+          <a:p>
+            <a:fld id="{3ED73BD4-D09B-C546-814B-6E77CE8F0BF0}" type="datetimeFigureOut">
+              <a:rPr lang="en-US" smtClean="0"/>
+              <a:t>3/30/26</a:t>
+            </a:fld>
+            <a:endParaRPr lang="en-US"/>
+          </a:p>
+        </p:txBody>
+      </p:sp>
+      <p:sp>
+        <p:nvSpPr>
+          <p:cNvPr id="4" name="Slide Image Placeholder 3"/>
+          <p:cNvSpPr>
+            <a:spLocks noGrp="1" noRot="1" noChangeAspect="1"/>
+          </p:cNvSpPr>
+          <p:nvPr>
+            <p:ph type="sldImg" idx="2"/>
+          </p:nvPr>
+        </p:nvSpPr>
+        <p:spPr>
+          <a:xfrm>
+            <a:off x="685800" y="1143000"/>
+            <a:ext cx="5486400" cy="3086100"/>
+          </a:xfrm>
+          <a:prstGeom prst="rect">
+            <a:avLst/>
+          </a:prstGeom>
+          <a:noFill/>
+          <a:ln w="12700">
+            <a:solidFill>
+              <a:prstClr val="black"/>
+            </a:solidFill>
+          </a:ln>
+        </p:spPr>
+        <p:txBody>
+          <a:bodyPr vert="horz" lIns="91440" tIns="45720" rIns="91440" bIns="45720" rtlCol="0" anchor="ctr"/>
+          <a:lstStyle/>
+          <a:p>
+            <a:endParaRPr lang="en-US"/>
+          </a:p>
+        </p:txBody>
+      </p:sp>
+      <p:sp>
+        <p:nvSpPr>
+          <p:cNvPr id="5" name="Notes Placeholder 4"/>
+          <p:cNvSpPr>
+            <a:spLocks noGrp="1"/>
+          </p:cNvSpPr>
+          <p:nvPr>
+            <p:ph type="body" sz="quarter" idx="3"/>
+          </p:nvPr>
+        </p:nvSpPr>
+        <p:spPr>
+          <a:xfrm>
+            <a:off x="685800" y="4400550"/>
+            <a:ext cx="5486400" cy="3600450"/>
+          </a:xfrm>
+          <a:prstGeom prst="rect">
+            <a:avLst/>
+          </a:prstGeom>
+        </p:spPr>
+        <p:txBody>
+          <a:bodyPr vert="horz" lIns="91440" tIns="45720" rIns="91440" bIns="45720" rtlCol="0"/>
+          <a:lstStyle/>
+          <a:p>
+            <a:pPr lvl="0"/>
+            <a:r>
+              <a:rPr lang="en-GB"/>
+              <a:t>Click to edit Master text styles</a:t>
+            </a:r>
+          </a:p>
+          <a:p>
+            <a:pPr lvl="1"/>
+            <a:r>
+              <a:rPr lang="en-GB"/>
+              <a:t>Second level</a:t>
+            </a:r>
+          </a:p>
+          <a:p>
+            <a:pPr lvl="2"/>
+            <a:r>
+              <a:rPr lang="en-GB"/>
+              <a:t>Third level</a:t>
+            </a:r>
+          </a:p>
+          <a:p>
+            <a:pPr lvl="3"/>
+            <a:r>
+              <a:rPr lang="en-GB"/>
+              <a:t>Fourth level</a:t>
+            </a:r>
+          </a:p>
+          <a:p>
+            <a:pPr lvl="4"/>
+            <a:r>
+              <a:rPr lang="en-GB"/>
+              <a:t>Fifth level</a:t>
+            </a:r>
+            <a:endParaRPr lang="en-US"/>
+          </a:p>
+        </p:txBody>
+      </p:sp>
+      <p:sp>
+        <p:nvSpPr>
+          <p:cNvPr id="6" name="Footer Placeholder 5"/>
+          <p:cNvSpPr>
+            <a:spLocks noGrp="1"/>
+          </p:cNvSpPr>
+          <p:nvPr>
+            <p:ph type="ftr" sz="quarter" idx="4"/>
+          </p:nvPr>
+        </p:nvSpPr>
+        <p:spPr>
+          <a:xfrm>
+            <a:off x="0" y="8685213"/>
+            <a:ext cx="2971800" cy="458787"/>
+          </a:xfrm>
+          <a:prstGeom prst="rect">
+            <a:avLst/>
+          </a:prstGeom>
+        </p:spPr>
+        <p:txBody>
+          <a:bodyPr vert="horz" lIns="91440" tIns="45720" rIns="91440" bIns="45720" rtlCol="0" anchor="b"/>
+          <a:lstStyle>
+            <a:lvl1pPr algn="l">
+              <a:defRPr sz="1200"/>
+            </a:lvl1pPr>
+          </a:lstStyle>
+          <a:p>
+            <a:endParaRPr lang="en-US"/>
+          </a:p>
+        </p:txBody>
+      </p:sp>
+      <p:sp>
+        <p:nvSpPr>
+          <p:cNvPr id="7" name="Slide Number Placeholder 6"/>
+          <p:cNvSpPr>
+            <a:spLocks noGrp="1"/>
+          </p:cNvSpPr>
+          <p:nvPr>
+            <p:ph type="sldNum" sz="quarter" idx="5"/>
+          </p:nvPr>
+        </p:nvSpPr>
+        <p:spPr>
+          <a:xfrm>
+            <a:off x="3884613" y="8685213"/>
+            <a:ext cx="2971800" cy="458787"/>
+          </a:xfrm>
+          <a:prstGeom prst="rect">
+            <a:avLst/>
+          </a:prstGeom>
+        </p:spPr>
+        <p:txBody>
+          <a:bodyPr vert="horz" lIns="91440" tIns="45720" rIns="91440" bIns="45720" rtlCol="0" anchor="b"/>
+          <a:lstStyle>
+            <a:lvl1pPr algn="r">
+              <a:defRPr sz="1200"/>
+            </a:lvl1pPr>
+          </a:lstStyle>
+          <a:p>
+            <a:fld id="{08870CAA-5867-0A4A-8647-39B528F3C4FF}" type="slidenum">
+              <a:rPr lang="en-US" smtClean="0"/>
+              <a:t>‹#›</a:t>
+            </a:fld>
+            <a:endParaRPr lang="en-US"/>
+          </a:p>
+        </p:txBody>
+      </p:sp>
+    </p:spTree>
+    <p:extLst>
+      <p:ext uri="{BB962C8B-B14F-4D97-AF65-F5344CB8AC3E}">
+        <p14:creationId xmlns:p14="http://schemas.microsoft.com/office/powerpoint/2010/main" val="3279879675"/>
+      </p:ext>
+    </p:extLst>
+  </p:cSld>
+  <p:clrMap bg1="lt1" tx1="dk1" bg2="lt2" tx2="dk2" accent1="accent1" accent2="accent2" accent3="accent3" accent4="accent4" accent5="accent5" accent6="accent6" hlink="hlink" folHlink="folHlink"/>
+  <p:notesStyle>
+    <a:lvl1pPr marL="0" algn="l" defTabSz="914400" rtl="0" eaLnBrk="1" latinLnBrk="0" hangingPunct="1">
+      <a:defRPr sz="1200" kern="1200">
+        <a:solidFill>
+          <a:schemeClr val="tx1"/>
+        </a:solidFill>
+        <a:latin typeface="+mn-lt"/>
+        <a:ea typeface="+mn-ea"/>
+        <a:cs typeface="+mn-cs"/>
+      </a:defRPr>
+    </a:lvl1pPr>
+    <a:lvl2pPr marL="457200" algn="l" defTabSz="914400" rtl="0" eaLnBrk="1" latinLnBrk="0" hangingPunct="1">
+      <a:defRPr sz="1200" kern="1200">
+        <a:solidFill>
+          <a:schemeClr val="tx1"/>
+        </a:solidFill>
+        <a:latin typeface="+mn-lt"/>
+        <a:ea typeface="+mn-ea"/>
+        <a:cs typeface="+mn-cs"/>
+      </a:defRPr>
+    </a:lvl2pPr>
+    <a:lvl3pPr marL="914400" algn="l" defTabSz="914400" rtl="0" eaLnBrk="1" latinLnBrk="0" hangingPunct="1">
+      <a:defRPr sz="1200" kern="1200">
+        <a:solidFill>
+          <a:schemeClr val="tx1"/>
+        </a:solidFill>
+        <a:latin typeface="+mn-lt"/>
+        <a:ea typeface="+mn-ea"/>
+        <a:cs typeface="+mn-cs"/>
+      </a:defRPr>
+    </a:lvl3pPr>
+    <a:lvl4pPr marL="1371600" algn="l" defTabSz="914400" rtl="0" eaLnBrk="1" latinLnBrk="0" hangingPunct="1">
+      <a:defRPr sz="1200" kern="1200">
+        <a:solidFill>
+          <a:schemeClr val="tx1"/>
+        </a:solidFill>
+        <a:latin typeface="+mn-lt"/>
+        <a:ea typeface="+mn-ea"/>
+        <a:cs typeface="+mn-cs"/>
+      </a:defRPr>
+    </a:lvl4pPr>
+    <a:lvl5pPr marL="1828800" algn="l" defTabSz="914400" rtl="0" eaLnBrk="1" latinLnBrk="0" hangingPunct="1">
+      <a:defRPr sz="1200" kern="1200">
+        <a:solidFill>
+          <a:schemeClr val="tx1"/>
+        </a:solidFill>
+        <a:latin typeface="+mn-lt"/>
+        <a:ea typeface="+mn-ea"/>
+        <a:cs typeface="+mn-cs"/>
+      </a:defRPr>
+    </a:lvl5pPr>
+    <a:lvl6pPr marL="2286000" algn="l" defTabSz="914400" rtl="0" eaLnBrk="1" latinLnBrk="0" hangingPunct="1">
+      <a:defRPr sz="1200" kern="1200">
+        <a:solidFill>
+          <a:schemeClr val="tx1"/>
+        </a:solidFill>
+        <a:latin typeface="+mn-lt"/>
+        <a:ea typeface="+mn-ea"/>
+        <a:cs typeface="+mn-cs"/>
+      </a:defRPr>
+    </a:lvl6pPr>
+    <a:lvl7pPr marL="2743200" algn="l" defTabSz="914400" rtl="0" eaLnBrk="1" latinLnBrk="0" hangingPunct="1">
+      <a:defRPr sz="1200" kern="1200">
+        <a:solidFill>
+          <a:schemeClr val="tx1"/>
+        </a:solidFill>
+        <a:latin typeface="+mn-lt"/>
+        <a:ea typeface="+mn-ea"/>
+        <a:cs typeface="+mn-cs"/>
+      </a:defRPr>
+    </a:lvl7pPr>
+    <a:lvl8pPr marL="3200400" algn="l" defTabSz="914400" rtl="0" eaLnBrk="1" latinLnBrk="0" hangingPunct="1">
+      <a:defRPr sz="1200" kern="1200">
+        <a:solidFill>
+          <a:schemeClr val="tx1"/>
+        </a:solidFill>
+        <a:latin typeface="+mn-lt"/>
+        <a:ea typeface="+mn-ea"/>
+        <a:cs typeface="+mn-cs"/>
+      </a:defRPr>
+    </a:lvl8pPr>
+    <a:lvl9pPr marL="3657600" algn="l" defTabSz="914400" rtl="0" eaLnBrk="1" latinLnBrk="0" hangingPunct="1">
+      <a:defRPr sz="1200" kern="1200">
+        <a:solidFill>
+          <a:schemeClr val="tx1"/>
+        </a:solidFill>
+        <a:latin typeface="+mn-lt"/>
+        <a:ea typeface="+mn-ea"/>
+        <a:cs typeface="+mn-cs"/>
+      </a:defRPr>
+    </a:lvl9pPr>
+  </p:notesStyle>
+</p:notesMaster>
+</file>
+
+<file path=ppt/notesSlides/notesSlide1.xml><?xml version="1.0" encoding="utf-8"?>
+<p:notes xmlns:a="http://schemas.openxmlformats.org/drawingml/2006/main" xmlns:r="http://schemas.openxmlformats.org/officeDocument/2006/relationships" xmlns:p="http://schemas.openxmlformats.org/presentationml/2006/main">
+  <p:cSld>
+    <p:spTree>
+      <p:nvGrpSpPr>
+        <p:cNvPr id="1" name=""/>
+        <p:cNvGrpSpPr/>
+        <p:nvPr/>
+      </p:nvGrpSpPr>
+      <p:grpSpPr>
+        <a:xfrm>
+          <a:off x="0" y="0"/>
+          <a:ext cx="0" cy="0"/>
+          <a:chOff x="0" y="0"/>
+          <a:chExt cx="0" cy="0"/>
+        </a:xfrm>
+      </p:grpSpPr>
+      <p:sp>
+        <p:nvSpPr>
+          <p:cNvPr id="2" name="Slide Image Placeholder 1"/>
+          <p:cNvSpPr>
+            <a:spLocks noGrp="1" noRot="1" noChangeAspect="1"/>
+          </p:cNvSpPr>
+          <p:nvPr>
+            <p:ph type="sldImg"/>
+          </p:nvPr>
+        </p:nvSpPr>
+        <p:spPr/>
+      </p:sp>
+      <p:sp>
+        <p:nvSpPr>
+          <p:cNvPr id="3" name="Notes Placeholder 2"/>
+          <p:cNvSpPr>
+            <a:spLocks noGrp="1"/>
+          </p:cNvSpPr>
+          <p:nvPr>
+            <p:ph type="body" idx="1"/>
+          </p:nvPr>
+        </p:nvSpPr>
+        <p:spPr/>
+        <p:txBody>
+          <a:bodyPr/>
+          <a:lstStyle/>
+          <a:p>
+            <a:endParaRPr lang="en-US" dirty="0"/>
+          </a:p>
+        </p:txBody>
+      </p:sp>
+      <p:sp>
+        <p:nvSpPr>
+          <p:cNvPr id="4" name="Slide Number Placeholder 3"/>
+          <p:cNvSpPr>
+            <a:spLocks noGrp="1"/>
+          </p:cNvSpPr>
+          <p:nvPr>
+            <p:ph type="sldNum" sz="quarter" idx="5"/>
+          </p:nvPr>
+        </p:nvSpPr>
+        <p:spPr/>
+        <p:txBody>
+          <a:bodyPr/>
+          <a:lstStyle/>
+          <a:p>
+            <a:fld id="{08870CAA-5867-0A4A-8647-39B528F3C4FF}" type="slidenum">
+              <a:rPr lang="en-US" smtClean="0"/>
+              <a:t>11</a:t>
+            </a:fld>
+            <a:endParaRPr lang="en-US"/>
+          </a:p>
+        </p:txBody>
+      </p:sp>
+    </p:spTree>
+    <p:extLst>
+      <p:ext uri="{BB962C8B-B14F-4D97-AF65-F5344CB8AC3E}">
+        <p14:creationId xmlns:p14="http://schemas.microsoft.com/office/powerpoint/2010/main" val="3763418179"/>
+      </p:ext>
+    </p:extLst>
+  </p:cSld>
+  <p:clrMapOvr>
+    <a:masterClrMapping/>
+  </p:clrMapOvr>
+</p:notes>
+</file>
+
 <file path=ppt/slideLayouts/slideLayout1.xml><?xml version="1.0" encoding="utf-8"?>
 <p:sldLayout xmlns:a="http://schemas.openxmlformats.org/drawingml/2006/main" xmlns:r="http://schemas.openxmlformats.org/officeDocument/2006/relationships" xmlns:p="http://schemas.openxmlformats.org/presentationml/2006/main" type="title" preserve="1">
   <p:cSld name="Title Slide">
@@ -324,7 +769,7 @@
             <a:fld id="{1D8BD707-D9CF-40AE-B4C6-C98DA3205C09}" type="datetimeFigureOut">
               <a:rPr lang="en-US" smtClean="0"/>
               <a:pPr/>
-              <a:t>3/28/26</a:t>
+              <a:t>3/30/26</a:t>
             </a:fld>
             <a:endParaRPr lang="en-US"/>
           </a:p>
@@ -489,7 +934,7 @@
             <a:fld id="{1D8BD707-D9CF-40AE-B4C6-C98DA3205C09}" type="datetimeFigureOut">
               <a:rPr lang="en-US" smtClean="0"/>
               <a:pPr/>
-              <a:t>3/28/26</a:t>
+              <a:t>3/30/26</a:t>
             </a:fld>
             <a:endParaRPr lang="en-US"/>
           </a:p>
@@ -664,7 +1109,7 @@
             <a:fld id="{1D8BD707-D9CF-40AE-B4C6-C98DA3205C09}" type="datetimeFigureOut">
               <a:rPr lang="en-US" smtClean="0"/>
               <a:pPr/>
-              <a:t>3/28/26</a:t>
+              <a:t>3/30/26</a:t>
             </a:fld>
             <a:endParaRPr lang="en-US"/>
           </a:p>
@@ -829,7 +1274,7 @@
             <a:fld id="{1D8BD707-D9CF-40AE-B4C6-C98DA3205C09}" type="datetimeFigureOut">
               <a:rPr lang="en-US" smtClean="0"/>
               <a:pPr/>
-              <a:t>3/28/26</a:t>
+              <a:t>3/30/26</a:t>
             </a:fld>
             <a:endParaRPr lang="en-US"/>
           </a:p>
@@ -1071,7 +1516,7 @@
             <a:fld id="{1D8BD707-D9CF-40AE-B4C6-C98DA3205C09}" type="datetimeFigureOut">
               <a:rPr lang="en-US" smtClean="0"/>
               <a:pPr/>
-              <a:t>3/28/26</a:t>
+              <a:t>3/30/26</a:t>
             </a:fld>
             <a:endParaRPr lang="en-US"/>
           </a:p>
@@ -1353,7 +1798,7 @@
             <a:fld id="{1D8BD707-D9CF-40AE-B4C6-C98DA3205C09}" type="datetimeFigureOut">
               <a:rPr lang="en-US" smtClean="0"/>
               <a:pPr/>
-              <a:t>3/28/26</a:t>
+              <a:t>3/30/26</a:t>
             </a:fld>
             <a:endParaRPr lang="en-US"/>
           </a:p>
@@ -1769,7 +2214,7 @@
             <a:fld id="{1D8BD707-D9CF-40AE-B4C6-C98DA3205C09}" type="datetimeFigureOut">
               <a:rPr lang="en-US" smtClean="0"/>
               <a:pPr/>
-              <a:t>3/28/26</a:t>
+              <a:t>3/30/26</a:t>
             </a:fld>
             <a:endParaRPr lang="en-US"/>
           </a:p>
@@ -1883,7 +2328,7 @@
             <a:fld id="{1D8BD707-D9CF-40AE-B4C6-C98DA3205C09}" type="datetimeFigureOut">
               <a:rPr lang="en-US" smtClean="0"/>
               <a:pPr/>
-              <a:t>3/28/26</a:t>
+              <a:t>3/30/26</a:t>
             </a:fld>
             <a:endParaRPr lang="en-US"/>
           </a:p>
@@ -1975,7 +2420,7 @@
             <a:fld id="{1D8BD707-D9CF-40AE-B4C6-C98DA3205C09}" type="datetimeFigureOut">
               <a:rPr lang="en-US" smtClean="0"/>
               <a:pPr/>
-              <a:t>3/28/26</a:t>
+              <a:t>3/30/26</a:t>
             </a:fld>
             <a:endParaRPr lang="en-US"/>
           </a:p>
@@ -2247,7 +2692,7 @@
             <a:fld id="{1D8BD707-D9CF-40AE-B4C6-C98DA3205C09}" type="datetimeFigureOut">
               <a:rPr lang="en-US" smtClean="0"/>
               <a:pPr/>
-              <a:t>3/28/26</a:t>
+              <a:t>3/30/26</a:t>
             </a:fld>
             <a:endParaRPr lang="en-US"/>
           </a:p>
@@ -2496,7 +2941,7 @@
             <a:fld id="{1D8BD707-D9CF-40AE-B4C6-C98DA3205C09}" type="datetimeFigureOut">
               <a:rPr lang="en-US" smtClean="0"/>
               <a:pPr/>
-              <a:t>3/28/26</a:t>
+              <a:t>3/30/26</a:t>
             </a:fld>
             <a:endParaRPr lang="en-US"/>
           </a:p>
@@ -2704,7 +3149,7 @@
             <a:fld id="{1D8BD707-D9CF-40AE-B4C6-C98DA3205C09}" type="datetimeFigureOut">
               <a:rPr lang="en-US" smtClean="0"/>
               <a:pPr/>
-              <a:t>3/28/26</a:t>
+              <a:t>3/30/26</a:t>
             </a:fld>
             <a:endParaRPr lang="en-US"/>
           </a:p>
@@ -4068,7 +4513,7 @@
               </a:spcBef>
             </a:pPr>
             <a:r>
-              <a:rPr lang="en-US" sz="2290">
+              <a:rPr lang="en-US" sz="2290" dirty="0">
                 <a:solidFill>
                   <a:srgbClr val="000000"/>
                 </a:solidFill>
@@ -4156,7 +4601,7 @@
               </a:spcBef>
             </a:pPr>
             <a:r>
-              <a:rPr lang="en-US" sz="6000">
+              <a:rPr lang="en-US" sz="6000" dirty="0">
                 <a:solidFill>
                   <a:srgbClr val="000000"/>
                 </a:solidFill>
@@ -4456,6 +4901,582 @@
   <p:cSld>
     <p:spTree>
       <p:nvGrpSpPr>
+        <p:cNvPr id="1" name="">
+          <a:extLst>
+            <a:ext uri="{FF2B5EF4-FFF2-40B4-BE49-F238E27FC236}">
+              <a16:creationId xmlns:a16="http://schemas.microsoft.com/office/drawing/2014/main" id="{076AC3F9-1DF3-051E-AD1F-3646AB96886F}"/>
+            </a:ext>
+          </a:extLst>
+        </p:cNvPr>
+        <p:cNvGrpSpPr/>
+        <p:nvPr/>
+      </p:nvGrpSpPr>
+      <p:grpSpPr>
+        <a:xfrm>
+          <a:off x="0" y="0"/>
+          <a:ext cx="0" cy="0"/>
+          <a:chOff x="0" y="0"/>
+          <a:chExt cx="0" cy="0"/>
+        </a:xfrm>
+      </p:grpSpPr>
+      <p:sp>
+        <p:nvSpPr>
+          <p:cNvPr id="2" name="Freeform 2">
+            <a:extLst>
+              <a:ext uri="{FF2B5EF4-FFF2-40B4-BE49-F238E27FC236}">
+                <a16:creationId xmlns:a16="http://schemas.microsoft.com/office/drawing/2014/main" id="{26FB9016-E41D-520D-09A6-ABB3A28C2038}"/>
+              </a:ext>
+            </a:extLst>
+          </p:cNvPr>
+          <p:cNvSpPr/>
+          <p:nvPr/>
+        </p:nvSpPr>
+        <p:spPr>
+          <a:xfrm flipH="1">
+            <a:off x="0" y="0"/>
+            <a:ext cx="18288000" cy="10287000"/>
+          </a:xfrm>
+          <a:custGeom>
+            <a:avLst/>
+            <a:gdLst/>
+            <a:ahLst/>
+            <a:cxnLst/>
+            <a:rect l="l" t="t" r="r" b="b"/>
+            <a:pathLst>
+              <a:path w="18288000" h="10287000">
+                <a:moveTo>
+                  <a:pt x="18288000" y="0"/>
+                </a:moveTo>
+                <a:lnTo>
+                  <a:pt x="0" y="0"/>
+                </a:lnTo>
+                <a:lnTo>
+                  <a:pt x="0" y="10287000"/>
+                </a:lnTo>
+                <a:lnTo>
+                  <a:pt x="18288000" y="10287000"/>
+                </a:lnTo>
+                <a:lnTo>
+                  <a:pt x="18288000" y="0"/>
+                </a:lnTo>
+                <a:close/>
+              </a:path>
+            </a:pathLst>
+          </a:custGeom>
+          <a:blipFill>
+            <a:blip r:embed="rId3"/>
+            <a:stretch>
+              <a:fillRect t="-8222" b="-8222"/>
+            </a:stretch>
+          </a:blipFill>
+        </p:spPr>
+        <p:txBody>
+          <a:bodyPr/>
+          <a:lstStyle/>
+          <a:p>
+            <a:endParaRPr lang="en-US" dirty="0"/>
+          </a:p>
+        </p:txBody>
+      </p:sp>
+      <p:sp>
+        <p:nvSpPr>
+          <p:cNvPr id="3" name="Freeform 3">
+            <a:extLst>
+              <a:ext uri="{FF2B5EF4-FFF2-40B4-BE49-F238E27FC236}">
+                <a16:creationId xmlns:a16="http://schemas.microsoft.com/office/drawing/2014/main" id="{A1948B36-1075-E06E-7FE4-7A751AF8A0FA}"/>
+              </a:ext>
+            </a:extLst>
+          </p:cNvPr>
+          <p:cNvSpPr/>
+          <p:nvPr/>
+        </p:nvSpPr>
+        <p:spPr>
+          <a:xfrm>
+            <a:off x="3356440" y="487958"/>
+            <a:ext cx="404109" cy="779859"/>
+          </a:xfrm>
+          <a:custGeom>
+            <a:avLst/>
+            <a:gdLst/>
+            <a:ahLst/>
+            <a:cxnLst/>
+            <a:rect l="l" t="t" r="r" b="b"/>
+            <a:pathLst>
+              <a:path w="404109" h="779859">
+                <a:moveTo>
+                  <a:pt x="0" y="0"/>
+                </a:moveTo>
+                <a:lnTo>
+                  <a:pt x="404109" y="0"/>
+                </a:lnTo>
+                <a:lnTo>
+                  <a:pt x="404109" y="779859"/>
+                </a:lnTo>
+                <a:lnTo>
+                  <a:pt x="0" y="779859"/>
+                </a:lnTo>
+                <a:lnTo>
+                  <a:pt x="0" y="0"/>
+                </a:lnTo>
+                <a:close/>
+              </a:path>
+            </a:pathLst>
+          </a:custGeom>
+          <a:blipFill>
+            <a:blip>
+              <a:extLst>
+                <a:ext uri="{96DAC541-7B7A-43D3-8B79-37D633B846F1}">
+                  <asvg:svgBlip xmlns:asvg="http://schemas.microsoft.com/office/drawing/2016/SVG/main" r:embed="rId4"/>
+                </a:ext>
+              </a:extLst>
+            </a:blip>
+            <a:stretch>
+              <a:fillRect/>
+            </a:stretch>
+          </a:blipFill>
+        </p:spPr>
+      </p:sp>
+      <p:grpSp>
+        <p:nvGrpSpPr>
+          <p:cNvPr id="8" name="Group 8">
+            <a:extLst>
+              <a:ext uri="{FF2B5EF4-FFF2-40B4-BE49-F238E27FC236}">
+                <a16:creationId xmlns:a16="http://schemas.microsoft.com/office/drawing/2014/main" id="{5BD033CE-A4CC-D460-D942-BDDDAD472EE6}"/>
+              </a:ext>
+            </a:extLst>
+          </p:cNvPr>
+          <p:cNvGrpSpPr/>
+          <p:nvPr/>
+        </p:nvGrpSpPr>
+        <p:grpSpPr>
+          <a:xfrm>
+            <a:off x="1929063" y="3670826"/>
+            <a:ext cx="890337" cy="895941"/>
+            <a:chOff x="0" y="0"/>
+            <a:chExt cx="711200" cy="723900"/>
+          </a:xfrm>
+        </p:grpSpPr>
+        <p:sp>
+          <p:nvSpPr>
+            <p:cNvPr id="9" name="Freeform 9">
+              <a:extLst>
+                <a:ext uri="{FF2B5EF4-FFF2-40B4-BE49-F238E27FC236}">
+                  <a16:creationId xmlns:a16="http://schemas.microsoft.com/office/drawing/2014/main" id="{ED13AE39-2472-49BB-A0FE-1AB8D8B604AD}"/>
+                </a:ext>
+              </a:extLst>
+            </p:cNvPr>
+            <p:cNvSpPr/>
+            <p:nvPr/>
+          </p:nvSpPr>
+          <p:spPr>
+            <a:xfrm>
+              <a:off x="0" y="0"/>
+              <a:ext cx="711200" cy="716280"/>
+            </a:xfrm>
+            <a:custGeom>
+              <a:avLst/>
+              <a:gdLst/>
+              <a:ahLst/>
+              <a:cxnLst/>
+              <a:rect l="l" t="t" r="r" b="b"/>
+              <a:pathLst>
+                <a:path w="711200" h="716280">
+                  <a:moveTo>
+                    <a:pt x="355600" y="0"/>
+                  </a:moveTo>
+                  <a:lnTo>
+                    <a:pt x="393700" y="43180"/>
+                  </a:lnTo>
+                  <a:lnTo>
+                    <a:pt x="441960" y="10160"/>
+                  </a:lnTo>
+                  <a:lnTo>
+                    <a:pt x="468630" y="60960"/>
+                  </a:lnTo>
+                  <a:lnTo>
+                    <a:pt x="521970" y="40640"/>
+                  </a:lnTo>
+                  <a:lnTo>
+                    <a:pt x="535940" y="96520"/>
+                  </a:lnTo>
+                  <a:lnTo>
+                    <a:pt x="593090" y="90170"/>
+                  </a:lnTo>
+                  <a:lnTo>
+                    <a:pt x="593090" y="147320"/>
+                  </a:lnTo>
+                  <a:lnTo>
+                    <a:pt x="650240" y="154940"/>
+                  </a:lnTo>
+                  <a:lnTo>
+                    <a:pt x="637540" y="210820"/>
+                  </a:lnTo>
+                  <a:lnTo>
+                    <a:pt x="690880" y="231140"/>
+                  </a:lnTo>
+                  <a:lnTo>
+                    <a:pt x="664210" y="281940"/>
+                  </a:lnTo>
+                  <a:lnTo>
+                    <a:pt x="711200" y="314960"/>
+                  </a:lnTo>
+                  <a:lnTo>
+                    <a:pt x="673100" y="358140"/>
+                  </a:lnTo>
+                  <a:lnTo>
+                    <a:pt x="711200" y="401320"/>
+                  </a:lnTo>
+                  <a:lnTo>
+                    <a:pt x="664210" y="434340"/>
+                  </a:lnTo>
+                  <a:lnTo>
+                    <a:pt x="690880" y="485140"/>
+                  </a:lnTo>
+                  <a:lnTo>
+                    <a:pt x="637540" y="505460"/>
+                  </a:lnTo>
+                  <a:lnTo>
+                    <a:pt x="650240" y="561340"/>
+                  </a:lnTo>
+                  <a:lnTo>
+                    <a:pt x="593090" y="568960"/>
+                  </a:lnTo>
+                  <a:lnTo>
+                    <a:pt x="593090" y="626110"/>
+                  </a:lnTo>
+                  <a:lnTo>
+                    <a:pt x="535940" y="619760"/>
+                  </a:lnTo>
+                  <a:lnTo>
+                    <a:pt x="521970" y="675640"/>
+                  </a:lnTo>
+                  <a:lnTo>
+                    <a:pt x="468630" y="655320"/>
+                  </a:lnTo>
+                  <a:lnTo>
+                    <a:pt x="441960" y="706120"/>
+                  </a:lnTo>
+                  <a:lnTo>
+                    <a:pt x="393700" y="673100"/>
+                  </a:lnTo>
+                  <a:lnTo>
+                    <a:pt x="355600" y="716280"/>
+                  </a:lnTo>
+                  <a:lnTo>
+                    <a:pt x="317500" y="673100"/>
+                  </a:lnTo>
+                  <a:lnTo>
+                    <a:pt x="269240" y="706120"/>
+                  </a:lnTo>
+                  <a:lnTo>
+                    <a:pt x="242570" y="655320"/>
+                  </a:lnTo>
+                  <a:lnTo>
+                    <a:pt x="189230" y="675640"/>
+                  </a:lnTo>
+                  <a:lnTo>
+                    <a:pt x="175260" y="619760"/>
+                  </a:lnTo>
+                  <a:lnTo>
+                    <a:pt x="118110" y="626110"/>
+                  </a:lnTo>
+                  <a:lnTo>
+                    <a:pt x="118110" y="568960"/>
+                  </a:lnTo>
+                  <a:lnTo>
+                    <a:pt x="60960" y="561340"/>
+                  </a:lnTo>
+                  <a:lnTo>
+                    <a:pt x="73660" y="505460"/>
+                  </a:lnTo>
+                  <a:lnTo>
+                    <a:pt x="20320" y="485140"/>
+                  </a:lnTo>
+                  <a:lnTo>
+                    <a:pt x="46990" y="434340"/>
+                  </a:lnTo>
+                  <a:lnTo>
+                    <a:pt x="0" y="401320"/>
+                  </a:lnTo>
+                  <a:lnTo>
+                    <a:pt x="38100" y="358140"/>
+                  </a:lnTo>
+                  <a:lnTo>
+                    <a:pt x="0" y="314960"/>
+                  </a:lnTo>
+                  <a:lnTo>
+                    <a:pt x="46990" y="281940"/>
+                  </a:lnTo>
+                  <a:lnTo>
+                    <a:pt x="20320" y="231140"/>
+                  </a:lnTo>
+                  <a:lnTo>
+                    <a:pt x="73660" y="210820"/>
+                  </a:lnTo>
+                  <a:lnTo>
+                    <a:pt x="60960" y="154940"/>
+                  </a:lnTo>
+                  <a:lnTo>
+                    <a:pt x="118110" y="147320"/>
+                  </a:lnTo>
+                  <a:lnTo>
+                    <a:pt x="118110" y="90170"/>
+                  </a:lnTo>
+                  <a:lnTo>
+                    <a:pt x="175260" y="96520"/>
+                  </a:lnTo>
+                  <a:lnTo>
+                    <a:pt x="189230" y="40640"/>
+                  </a:lnTo>
+                  <a:lnTo>
+                    <a:pt x="242570" y="60960"/>
+                  </a:lnTo>
+                  <a:lnTo>
+                    <a:pt x="269240" y="10160"/>
+                  </a:lnTo>
+                  <a:lnTo>
+                    <a:pt x="317500" y="43180"/>
+                  </a:lnTo>
+                  <a:close/>
+                </a:path>
+              </a:pathLst>
+            </a:custGeom>
+            <a:solidFill>
+              <a:srgbClr val="FFBD59">
+                <a:alpha val="42745"/>
+              </a:srgbClr>
+            </a:solidFill>
+          </p:spPr>
+        </p:sp>
+        <p:sp>
+          <p:nvSpPr>
+            <p:cNvPr id="10" name="TextBox 10">
+              <a:extLst>
+                <a:ext uri="{FF2B5EF4-FFF2-40B4-BE49-F238E27FC236}">
+                  <a16:creationId xmlns:a16="http://schemas.microsoft.com/office/drawing/2014/main" id="{04EC2365-E952-8F8A-1016-6D70F8068CEE}"/>
+                </a:ext>
+              </a:extLst>
+            </p:cNvPr>
+            <p:cNvSpPr txBox="1"/>
+            <p:nvPr/>
+          </p:nvSpPr>
+          <p:spPr>
+            <a:xfrm>
+              <a:off x="38100" y="0"/>
+              <a:ext cx="635000" cy="673100"/>
+            </a:xfrm>
+            <a:prstGeom prst="rect">
+              <a:avLst/>
+            </a:prstGeom>
+          </p:spPr>
+          <p:txBody>
+            <a:bodyPr lIns="50800" tIns="50800" rIns="50800" bIns="50800" rtlCol="0" anchor="ctr"/>
+            <a:lstStyle/>
+            <a:p>
+              <a:pPr algn="ctr">
+                <a:lnSpc>
+                  <a:spcPts val="2520"/>
+                </a:lnSpc>
+              </a:pPr>
+              <a:endParaRPr/>
+            </a:p>
+          </p:txBody>
+        </p:sp>
+      </p:grpSp>
+      <p:sp>
+        <p:nvSpPr>
+          <p:cNvPr id="11" name="TextBox 11">
+            <a:extLst>
+              <a:ext uri="{FF2B5EF4-FFF2-40B4-BE49-F238E27FC236}">
+                <a16:creationId xmlns:a16="http://schemas.microsoft.com/office/drawing/2014/main" id="{51651FFB-8257-AEC0-88BA-34EC495F244C}"/>
+              </a:ext>
+            </a:extLst>
+          </p:cNvPr>
+          <p:cNvSpPr txBox="1"/>
+          <p:nvPr/>
+        </p:nvSpPr>
+        <p:spPr>
+          <a:xfrm>
+            <a:off x="2819400" y="1863849"/>
+            <a:ext cx="7875162" cy="961802"/>
+          </a:xfrm>
+          <a:prstGeom prst="rect">
+            <a:avLst/>
+          </a:prstGeom>
+        </p:spPr>
+        <p:txBody>
+          <a:bodyPr lIns="0" tIns="0" rIns="0" bIns="0" rtlCol="0" anchor="t">
+            <a:spAutoFit/>
+          </a:bodyPr>
+          <a:lstStyle/>
+          <a:p>
+            <a:pPr marL="0" lvl="0" indent="0" algn="l">
+              <a:lnSpc>
+                <a:spcPts val="8400"/>
+              </a:lnSpc>
+              <a:spcBef>
+                <a:spcPct val="0"/>
+              </a:spcBef>
+            </a:pPr>
+            <a:r>
+              <a:rPr lang="en-US" sz="6000" dirty="0">
+                <a:solidFill>
+                  <a:srgbClr val="000000"/>
+                </a:solidFill>
+                <a:latin typeface="Crusoe Text"/>
+                <a:ea typeface="Crusoe Text"/>
+                <a:cs typeface="Crusoe Text"/>
+                <a:sym typeface="Crusoe Text"/>
+              </a:rPr>
+              <a:t>CONCLUSION</a:t>
+            </a:r>
+          </a:p>
+        </p:txBody>
+      </p:sp>
+      <p:sp>
+        <p:nvSpPr>
+          <p:cNvPr id="12" name="TextBox 12">
+            <a:extLst>
+              <a:ext uri="{FF2B5EF4-FFF2-40B4-BE49-F238E27FC236}">
+                <a16:creationId xmlns:a16="http://schemas.microsoft.com/office/drawing/2014/main" id="{AF4D6204-1398-617A-1E94-2E7F6199B2E4}"/>
+              </a:ext>
+            </a:extLst>
+          </p:cNvPr>
+          <p:cNvSpPr txBox="1"/>
+          <p:nvPr/>
+        </p:nvSpPr>
+        <p:spPr>
+          <a:xfrm>
+            <a:off x="2819400" y="3890494"/>
+            <a:ext cx="7467600" cy="1107996"/>
+          </a:xfrm>
+          <a:prstGeom prst="rect">
+            <a:avLst/>
+          </a:prstGeom>
+        </p:spPr>
+        <p:txBody>
+          <a:bodyPr wrap="square" lIns="0" tIns="0" rIns="0" bIns="0" rtlCol="0" anchor="t">
+            <a:spAutoFit/>
+          </a:bodyPr>
+          <a:lstStyle/>
+          <a:p>
+            <a:r>
+              <a:rPr lang="en-ZA" dirty="0">
+                <a:latin typeface="Avenir Next Condensed" panose="020B0506020202020204" pitchFamily="34" charset="0"/>
+                <a:cs typeface="Apple Chancery" panose="03020702040506060504" pitchFamily="66" charset="-79"/>
+              </a:rPr>
+              <a:t>This project shows how raw data can be transformed into useful insights. It demonstrates my ability to clean data, analyse trends, and present findings in a clear and structured way.</a:t>
+            </a:r>
+          </a:p>
+          <a:p>
+            <a:r>
+              <a:rPr lang="en-ZA" dirty="0">
+                <a:latin typeface="Avenir Next Condensed" panose="020B0506020202020204" pitchFamily="34" charset="0"/>
+                <a:cs typeface="Apple Chancery" panose="03020702040506060504" pitchFamily="66" charset="-79"/>
+              </a:rPr>
+              <a:t>It also highlights my growing skills in SQL, data analysis, and problem-solving, and my ability to connect data insights to real business decisions.</a:t>
+            </a:r>
+          </a:p>
+        </p:txBody>
+      </p:sp>
+      <p:sp>
+        <p:nvSpPr>
+          <p:cNvPr id="13" name="TextBox 13">
+            <a:extLst>
+              <a:ext uri="{FF2B5EF4-FFF2-40B4-BE49-F238E27FC236}">
+                <a16:creationId xmlns:a16="http://schemas.microsoft.com/office/drawing/2014/main" id="{60B11D9C-29FC-71E8-6DBA-BEC23F84DCEC}"/>
+              </a:ext>
+            </a:extLst>
+          </p:cNvPr>
+          <p:cNvSpPr txBox="1"/>
+          <p:nvPr/>
+        </p:nvSpPr>
+        <p:spPr>
+          <a:xfrm>
+            <a:off x="3962400" y="703513"/>
+            <a:ext cx="2974353" cy="349250"/>
+          </a:xfrm>
+          <a:prstGeom prst="rect">
+            <a:avLst/>
+          </a:prstGeom>
+        </p:spPr>
+        <p:txBody>
+          <a:bodyPr lIns="0" tIns="0" rIns="0" bIns="0" rtlCol="0" anchor="t">
+            <a:spAutoFit/>
+          </a:bodyPr>
+          <a:lstStyle/>
+          <a:p>
+            <a:pPr marL="0" lvl="0" indent="0" algn="l">
+              <a:lnSpc>
+                <a:spcPts val="2800"/>
+              </a:lnSpc>
+              <a:spcBef>
+                <a:spcPct val="0"/>
+              </a:spcBef>
+            </a:pPr>
+            <a:r>
+              <a:rPr lang="en-US" sz="2000" dirty="0">
+                <a:solidFill>
+                  <a:srgbClr val="000000"/>
+                </a:solidFill>
+                <a:latin typeface="Crusoe Text"/>
+                <a:ea typeface="Crusoe Text"/>
+                <a:cs typeface="Crusoe Text"/>
+                <a:sym typeface="Crusoe Text"/>
+              </a:rPr>
+              <a:t>Bright Coffee Shop</a:t>
+            </a:r>
+          </a:p>
+        </p:txBody>
+      </p:sp>
+      <p:pic>
+        <p:nvPicPr>
+          <p:cNvPr id="7" name="Picture 6">
+            <a:extLst>
+              <a:ext uri="{FF2B5EF4-FFF2-40B4-BE49-F238E27FC236}">
+                <a16:creationId xmlns:a16="http://schemas.microsoft.com/office/drawing/2014/main" id="{E95C7A04-E7EB-54F2-877C-9ABC2663CC2A}"/>
+              </a:ext>
+            </a:extLst>
+          </p:cNvPr>
+          <p:cNvPicPr>
+            <a:picLocks noChangeAspect="1"/>
+          </p:cNvPicPr>
+          <p:nvPr/>
+        </p:nvPicPr>
+        <p:blipFill>
+          <a:blip r:embed="rId5"/>
+          <a:stretch>
+            <a:fillRect/>
+          </a:stretch>
+        </p:blipFill>
+        <p:spPr>
+          <a:xfrm>
+            <a:off x="12509443" y="-19770"/>
+            <a:ext cx="5826253" cy="10306769"/>
+          </a:xfrm>
+          <a:prstGeom prst="rect">
+            <a:avLst/>
+          </a:prstGeom>
+        </p:spPr>
+      </p:pic>
+    </p:spTree>
+    <p:extLst>
+      <p:ext uri="{BB962C8B-B14F-4D97-AF65-F5344CB8AC3E}">
+        <p14:creationId xmlns:p14="http://schemas.microsoft.com/office/powerpoint/2010/main" val="3124690145"/>
+      </p:ext>
+    </p:extLst>
+  </p:cSld>
+  <p:clrMapOvr>
+    <a:masterClrMapping/>
+  </p:clrMapOvr>
+</p:sld>
+</file>
+
+<file path=ppt/slides/slide12.xml><?xml version="1.0" encoding="utf-8"?>
+<p:sld xmlns:a="http://schemas.openxmlformats.org/drawingml/2006/main" xmlns:r="http://schemas.openxmlformats.org/officeDocument/2006/relationships" xmlns:p="http://schemas.openxmlformats.org/presentationml/2006/main">
+  <p:cSld>
+    <p:spTree>
+      <p:nvGrpSpPr>
         <p:cNvPr id="1" name=""/>
         <p:cNvGrpSpPr/>
         <p:nvPr/>
@@ -6026,7 +7047,7 @@
         </p:nvSpPr>
         <p:spPr>
           <a:xfrm>
-            <a:off x="3063925" y="289520"/>
+            <a:off x="3124200" y="409087"/>
             <a:ext cx="2974353" cy="349250"/>
           </a:xfrm>
           <a:prstGeom prst="rect">
@@ -6048,7 +7069,7 @@
               </a:spcBef>
             </a:pPr>
             <a:r>
-              <a:rPr lang="en-US" sz="2000">
+              <a:rPr lang="en-US" sz="2000" dirty="0">
                 <a:solidFill>
                   <a:srgbClr val="000000"/>
                 </a:solidFill>
@@ -6938,7 +7959,7 @@
         </p:nvSpPr>
         <p:spPr>
           <a:xfrm>
-            <a:off x="2782047" y="679450"/>
+            <a:off x="2924922" y="675086"/>
             <a:ext cx="2974353" cy="349250"/>
           </a:xfrm>
           <a:prstGeom prst="rect">
@@ -6960,7 +7981,7 @@
               </a:spcBef>
             </a:pPr>
             <a:r>
-              <a:rPr lang="en-US" sz="2000">
+              <a:rPr lang="en-US" sz="2000" dirty="0">
                 <a:solidFill>
                   <a:srgbClr val="000000"/>
                 </a:solidFill>
@@ -7320,7 +8341,7 @@
         </p:nvSpPr>
         <p:spPr>
           <a:xfrm>
-            <a:off x="2534692" y="679450"/>
+            <a:off x="2731170" y="670883"/>
             <a:ext cx="2974353" cy="349250"/>
           </a:xfrm>
           <a:prstGeom prst="rect">
@@ -7342,7 +8363,7 @@
               </a:spcBef>
             </a:pPr>
             <a:r>
-              <a:rPr lang="en-US" sz="2000">
+              <a:rPr lang="en-US" sz="2000" dirty="0">
                 <a:solidFill>
                   <a:srgbClr val="000000"/>
                 </a:solidFill>
@@ -7722,7 +8743,7 @@
         </p:nvSpPr>
         <p:spPr>
           <a:xfrm>
-            <a:off x="2848954" y="830263"/>
+            <a:off x="2945383" y="843139"/>
             <a:ext cx="2974353" cy="349250"/>
           </a:xfrm>
           <a:prstGeom prst="rect">
@@ -7744,7 +8765,7 @@
               </a:spcBef>
             </a:pPr>
             <a:r>
-              <a:rPr lang="en-US" sz="2000">
+              <a:rPr lang="en-US" sz="2000" dirty="0">
                 <a:solidFill>
                   <a:srgbClr val="000000"/>
                 </a:solidFill>
@@ -8889,4 +9910,319 @@
   <a:objectDefaults/>
   <a:extraClrSchemeLst/>
 </a:theme>
+</file>
+
+<file path=ppt/theme/theme2.xml><?xml version="1.0" encoding="utf-8"?>
+<a:theme xmlns:a="http://schemas.openxmlformats.org/drawingml/2006/main" name="Office Theme">
+  <a:themeElements>
+    <a:clrScheme name="Office">
+      <a:dk1>
+        <a:sysClr val="windowText" lastClr="000000"/>
+      </a:dk1>
+      <a:lt1>
+        <a:sysClr val="window" lastClr="FFFFFF"/>
+      </a:lt1>
+      <a:dk2>
+        <a:srgbClr val="0E2841"/>
+      </a:dk2>
+      <a:lt2>
+        <a:srgbClr val="E8E8E8"/>
+      </a:lt2>
+      <a:accent1>
+        <a:srgbClr val="156082"/>
+      </a:accent1>
+      <a:accent2>
+        <a:srgbClr val="E97132"/>
+      </a:accent2>
+      <a:accent3>
+        <a:srgbClr val="196B24"/>
+      </a:accent3>
+      <a:accent4>
+        <a:srgbClr val="0F9ED5"/>
+      </a:accent4>
+      <a:accent5>
+        <a:srgbClr val="A02B93"/>
+      </a:accent5>
+      <a:accent6>
+        <a:srgbClr val="4EA72E"/>
+      </a:accent6>
+      <a:hlink>
+        <a:srgbClr val="467886"/>
+      </a:hlink>
+      <a:folHlink>
+        <a:srgbClr val="96607D"/>
+      </a:folHlink>
+    </a:clrScheme>
+    <a:fontScheme name="Office">
+      <a:majorFont>
+        <a:latin typeface="Aptos Display" panose="02110004020202020204"/>
+        <a:ea typeface=""/>
+        <a:cs typeface=""/>
+        <a:font script="Jpan" typeface="游ゴシック Light"/>
+        <a:font script="Hang" typeface="맑은 고딕"/>
+        <a:font script="Hans" typeface="等线 Light"/>
+        <a:font script="Hant" typeface="新細明體"/>
+        <a:font script="Arab" typeface="Times New Roman"/>
+        <a:font script="Hebr" typeface="Times New Roman"/>
+        <a:font script="Thai" typeface="Angsana New"/>
+        <a:font script="Ethi" typeface="Nyala"/>
+        <a:font script="Beng" typeface="Vrinda"/>
+        <a:font script="Gujr" typeface="Shruti"/>
+        <a:font script="Khmr" typeface="MoolBoran"/>
+        <a:font script="Knda" typeface="Tunga"/>
+        <a:font script="Guru" typeface="Raavi"/>
+        <a:font script="Cans" typeface="Euphemia"/>
+        <a:font script="Cher" typeface="Plantagenet Cherokee"/>
+        <a:font script="Yiii" typeface="Microsoft Yi Baiti"/>
+        <a:font script="Tibt" typeface="Microsoft Himalaya"/>
+        <a:font script="Thaa" typeface="MV Boli"/>
+        <a:font script="Deva" typeface="Mangal"/>
+        <a:font script="Telu" typeface="Gautami"/>
+        <a:font script="Taml" typeface="Latha"/>
+        <a:font script="Syrc" typeface="Estrangelo Edessa"/>
+        <a:font script="Orya" typeface="Kalinga"/>
+        <a:font script="Mlym" typeface="Kartika"/>
+        <a:font script="Laoo" typeface="DokChampa"/>
+        <a:font script="Sinh" typeface="Iskoola Pota"/>
+        <a:font script="Mong" typeface="Mongolian Baiti"/>
+        <a:font script="Viet" typeface="Times New Roman"/>
+        <a:font script="Uigh" typeface="Microsoft Uighur"/>
+        <a:font script="Geor" typeface="Sylfaen"/>
+        <a:font script="Armn" typeface="Arial"/>
+        <a:font script="Bugi" typeface="Leelawadee UI"/>
+        <a:font script="Bopo" typeface="Microsoft JhengHei"/>
+        <a:font script="Java" typeface="Javanese Text"/>
+        <a:font script="Lisu" typeface="Segoe UI"/>
+        <a:font script="Mymr" typeface="Myanmar Text"/>
+        <a:font script="Nkoo" typeface="Ebrima"/>
+        <a:font script="Olck" typeface="Nirmala UI"/>
+        <a:font script="Osma" typeface="Ebrima"/>
+        <a:font script="Phag" typeface="Phagspa"/>
+        <a:font script="Syrn" typeface="Estrangelo Edessa"/>
+        <a:font script="Syrj" typeface="Estrangelo Edessa"/>
+        <a:font script="Syre" typeface="Estrangelo Edessa"/>
+        <a:font script="Sora" typeface="Nirmala UI"/>
+        <a:font script="Tale" typeface="Microsoft Tai Le"/>
+        <a:font script="Talu" typeface="Microsoft New Tai Lue"/>
+        <a:font script="Tfng" typeface="Ebrima"/>
+      </a:majorFont>
+      <a:minorFont>
+        <a:latin typeface="Aptos" panose="02110004020202020204"/>
+        <a:ea typeface=""/>
+        <a:cs typeface=""/>
+        <a:font script="Jpan" typeface="游ゴシック"/>
+        <a:font script="Hang" typeface="맑은 고딕"/>
+        <a:font script="Hans" typeface="等线"/>
+        <a:font script="Hant" typeface="新細明體"/>
+        <a:font script="Arab" typeface="Arial"/>
+        <a:font script="Hebr" typeface="Arial"/>
+        <a:font script="Thai" typeface="Cordia New"/>
+        <a:font script="Ethi" typeface="Nyala"/>
+        <a:font script="Beng" typeface="Vrinda"/>
+        <a:font script="Gujr" typeface="Shruti"/>
+        <a:font script="Khmr" typeface="DaunPenh"/>
+        <a:font script="Knda" typeface="Tunga"/>
+        <a:font script="Guru" typeface="Raavi"/>
+        <a:font script="Cans" typeface="Euphemia"/>
+        <a:font script="Cher" typeface="Plantagenet Cherokee"/>
+        <a:font script="Yiii" typeface="Microsoft Yi Baiti"/>
+        <a:font script="Tibt" typeface="Microsoft Himalaya"/>
+        <a:font script="Thaa" typeface="MV Boli"/>
+        <a:font script="Deva" typeface="Mangal"/>
+        <a:font script="Telu" typeface="Gautami"/>
+        <a:font script="Taml" typeface="Latha"/>
+        <a:font script="Syrc" typeface="Estrangelo Edessa"/>
+        <a:font script="Orya" typeface="Kalinga"/>
+        <a:font script="Mlym" typeface="Kartika"/>
+        <a:font script="Laoo" typeface="DokChampa"/>
+        <a:font script="Sinh" typeface="Iskoola Pota"/>
+        <a:font script="Mong" typeface="Mongolian Baiti"/>
+        <a:font script="Viet" typeface="Arial"/>
+        <a:font script="Uigh" typeface="Microsoft Uighur"/>
+        <a:font script="Geor" typeface="Sylfaen"/>
+        <a:font script="Armn" typeface="Arial"/>
+        <a:font script="Bugi" typeface="Leelawadee UI"/>
+        <a:font script="Bopo" typeface="Microsoft JhengHei"/>
+        <a:font script="Java" typeface="Javanese Text"/>
+        <a:font script="Lisu" typeface="Segoe UI"/>
+        <a:font script="Mymr" typeface="Myanmar Text"/>
+        <a:font script="Nkoo" typeface="Ebrima"/>
+        <a:font script="Olck" typeface="Nirmala UI"/>
+        <a:font script="Osma" typeface="Ebrima"/>
+        <a:font script="Phag" typeface="Phagspa"/>
+        <a:font script="Syrn" typeface="Estrangelo Edessa"/>
+        <a:font script="Syrj" typeface="Estrangelo Edessa"/>
+        <a:font script="Syre" typeface="Estrangelo Edessa"/>
+        <a:font script="Sora" typeface="Nirmala UI"/>
+        <a:font script="Tale" typeface="Microsoft Tai Le"/>
+        <a:font script="Talu" typeface="Microsoft New Tai Lue"/>
+        <a:font script="Tfng" typeface="Ebrima"/>
+      </a:minorFont>
+    </a:fontScheme>
+    <a:fmtScheme name="Office">
+      <a:fillStyleLst>
+        <a:solidFill>
+          <a:schemeClr val="phClr"/>
+        </a:solidFill>
+        <a:gradFill rotWithShape="1">
+          <a:gsLst>
+            <a:gs pos="0">
+              <a:schemeClr val="phClr">
+                <a:lumMod val="110000"/>
+                <a:satMod val="105000"/>
+                <a:tint val="67000"/>
+              </a:schemeClr>
+            </a:gs>
+            <a:gs pos="50000">
+              <a:schemeClr val="phClr">
+                <a:lumMod val="105000"/>
+                <a:satMod val="103000"/>
+                <a:tint val="73000"/>
+              </a:schemeClr>
+            </a:gs>
+            <a:gs pos="100000">
+              <a:schemeClr val="phClr">
+                <a:lumMod val="105000"/>
+                <a:satMod val="109000"/>
+                <a:tint val="81000"/>
+              </a:schemeClr>
+            </a:gs>
+          </a:gsLst>
+          <a:lin ang="5400000" scaled="0"/>
+        </a:gradFill>
+        <a:gradFill rotWithShape="1">
+          <a:gsLst>
+            <a:gs pos="0">
+              <a:schemeClr val="phClr">
+                <a:satMod val="103000"/>
+                <a:lumMod val="102000"/>
+                <a:tint val="94000"/>
+              </a:schemeClr>
+            </a:gs>
+            <a:gs pos="50000">
+              <a:schemeClr val="phClr">
+                <a:satMod val="110000"/>
+                <a:lumMod val="100000"/>
+                <a:shade val="100000"/>
+              </a:schemeClr>
+            </a:gs>
+            <a:gs pos="100000">
+              <a:schemeClr val="phClr">
+                <a:lumMod val="99000"/>
+                <a:satMod val="120000"/>
+                <a:shade val="78000"/>
+              </a:schemeClr>
+            </a:gs>
+          </a:gsLst>
+          <a:lin ang="5400000" scaled="0"/>
+        </a:gradFill>
+      </a:fillStyleLst>
+      <a:lnStyleLst>
+        <a:ln w="12700" cap="flat" cmpd="sng" algn="ctr">
+          <a:solidFill>
+            <a:schemeClr val="phClr"/>
+          </a:solidFill>
+          <a:prstDash val="solid"/>
+          <a:miter lim="800000"/>
+        </a:ln>
+        <a:ln w="19050" cap="flat" cmpd="sng" algn="ctr">
+          <a:solidFill>
+            <a:schemeClr val="phClr"/>
+          </a:solidFill>
+          <a:prstDash val="solid"/>
+          <a:miter lim="800000"/>
+        </a:ln>
+        <a:ln w="25400" cap="flat" cmpd="sng" algn="ctr">
+          <a:solidFill>
+            <a:schemeClr val="phClr"/>
+          </a:solidFill>
+          <a:prstDash val="solid"/>
+          <a:miter lim="800000"/>
+        </a:ln>
+      </a:lnStyleLst>
+      <a:effectStyleLst>
+        <a:effectStyle>
+          <a:effectLst/>
+        </a:effectStyle>
+        <a:effectStyle>
+          <a:effectLst/>
+        </a:effectStyle>
+        <a:effectStyle>
+          <a:effectLst>
+            <a:outerShdw blurRad="57150" dist="19050" dir="5400000" algn="ctr" rotWithShape="0">
+              <a:srgbClr val="000000">
+                <a:alpha val="63000"/>
+              </a:srgbClr>
+            </a:outerShdw>
+          </a:effectLst>
+        </a:effectStyle>
+      </a:effectStyleLst>
+      <a:bgFillStyleLst>
+        <a:solidFill>
+          <a:schemeClr val="phClr"/>
+        </a:solidFill>
+        <a:solidFill>
+          <a:schemeClr val="phClr">
+            <a:tint val="95000"/>
+            <a:satMod val="170000"/>
+          </a:schemeClr>
+        </a:solidFill>
+        <a:gradFill rotWithShape="1">
+          <a:gsLst>
+            <a:gs pos="0">
+              <a:schemeClr val="phClr">
+                <a:tint val="93000"/>
+                <a:satMod val="150000"/>
+                <a:shade val="98000"/>
+                <a:lumMod val="102000"/>
+              </a:schemeClr>
+            </a:gs>
+            <a:gs pos="50000">
+              <a:schemeClr val="phClr">
+                <a:tint val="98000"/>
+                <a:satMod val="130000"/>
+                <a:shade val="90000"/>
+                <a:lumMod val="103000"/>
+              </a:schemeClr>
+            </a:gs>
+            <a:gs pos="100000">
+              <a:schemeClr val="phClr">
+                <a:shade val="63000"/>
+                <a:satMod val="120000"/>
+              </a:schemeClr>
+            </a:gs>
+          </a:gsLst>
+          <a:lin ang="5400000" scaled="0"/>
+        </a:gradFill>
+      </a:bgFillStyleLst>
+    </a:fmtScheme>
+  </a:themeElements>
+  <a:objectDefaults>
+    <a:lnDef>
+      <a:spPr/>
+      <a:bodyPr/>
+      <a:lstStyle/>
+      <a:style>
+        <a:lnRef idx="2">
+          <a:schemeClr val="accent1"/>
+        </a:lnRef>
+        <a:fillRef idx="0">
+          <a:schemeClr val="accent1"/>
+        </a:fillRef>
+        <a:effectRef idx="1">
+          <a:schemeClr val="accent1"/>
+        </a:effectRef>
+        <a:fontRef idx="minor">
+          <a:schemeClr val="tx1"/>
+        </a:fontRef>
+      </a:style>
+    </a:lnDef>
+  </a:objectDefaults>
+  <a:extraClrSchemeLst/>
+  <a:extLst>
+    <a:ext uri="{05A4C25C-085E-4340-85A3-A5531E510DB2}">
+      <thm15:themeFamily xmlns:thm15="http://schemas.microsoft.com/office/thememl/2012/main" name="Office Theme" id="{2E142A2C-CD16-42D6-873A-C26D2A0506FA}" vid="{1BDDFF52-6CD6-40A5-AB3C-68EB2F1E4D0A}"/>
+    </a:ext>
+  </a:extLst>
+</a:theme>
 </file>